--- a/topic-06-week6/unit-1/talk-1-routerconf/router-conf.pptx
+++ b/topic-06-week6/unit-1/talk-1-routerconf/router-conf.pptx
@@ -214,7 +214,7 @@
           <a:p>
             <a:fld id="{C2AA78A1-F382-4505-B980-6FC3A4847748}" type="datetimeFigureOut">
               <a:rPr lang="en-IE" smtClean="0"/>
-              <a:t>12/10/2025</a:t>
+              <a:t>04/03/2026</a:t>
             </a:fld>
             <a:endParaRPr lang="en-IE"/>
           </a:p>
@@ -2852,7 +2852,7 @@
           <a:p>
             <a:fld id="{A84DC70D-79E8-44C0-9D0A-A84A8BDF845D}" type="datetimeFigureOut">
               <a:rPr lang="en-IE" smtClean="0"/>
-              <a:t>12/10/2025</a:t>
+              <a:t>04/03/2026</a:t>
             </a:fld>
             <a:endParaRPr lang="en-IE"/>
           </a:p>
@@ -3052,7 +3052,7 @@
           <a:p>
             <a:fld id="{A84DC70D-79E8-44C0-9D0A-A84A8BDF845D}" type="datetimeFigureOut">
               <a:rPr lang="en-IE" smtClean="0"/>
-              <a:t>12/10/2025</a:t>
+              <a:t>04/03/2026</a:t>
             </a:fld>
             <a:endParaRPr lang="en-IE"/>
           </a:p>
@@ -3262,7 +3262,7 @@
           <a:p>
             <a:fld id="{A84DC70D-79E8-44C0-9D0A-A84A8BDF845D}" type="datetimeFigureOut">
               <a:rPr lang="en-IE" smtClean="0"/>
-              <a:t>12/10/2025</a:t>
+              <a:t>04/03/2026</a:t>
             </a:fld>
             <a:endParaRPr lang="en-IE"/>
           </a:p>
@@ -8129,7 +8129,7 @@
           <a:p>
             <a:fld id="{A84DC70D-79E8-44C0-9D0A-A84A8BDF845D}" type="datetimeFigureOut">
               <a:rPr lang="en-IE" smtClean="0"/>
-              <a:t>12/10/2025</a:t>
+              <a:t>04/03/2026</a:t>
             </a:fld>
             <a:endParaRPr lang="en-IE"/>
           </a:p>
@@ -8405,7 +8405,7 @@
           <a:p>
             <a:fld id="{A84DC70D-79E8-44C0-9D0A-A84A8BDF845D}" type="datetimeFigureOut">
               <a:rPr lang="en-IE" smtClean="0"/>
-              <a:t>12/10/2025</a:t>
+              <a:t>04/03/2026</a:t>
             </a:fld>
             <a:endParaRPr lang="en-IE"/>
           </a:p>
@@ -8673,7 +8673,7 @@
           <a:p>
             <a:fld id="{A84DC70D-79E8-44C0-9D0A-A84A8BDF845D}" type="datetimeFigureOut">
               <a:rPr lang="en-IE" smtClean="0"/>
-              <a:t>12/10/2025</a:t>
+              <a:t>04/03/2026</a:t>
             </a:fld>
             <a:endParaRPr lang="en-IE"/>
           </a:p>
@@ -9088,7 +9088,7 @@
           <a:p>
             <a:fld id="{A84DC70D-79E8-44C0-9D0A-A84A8BDF845D}" type="datetimeFigureOut">
               <a:rPr lang="en-IE" smtClean="0"/>
-              <a:t>12/10/2025</a:t>
+              <a:t>04/03/2026</a:t>
             </a:fld>
             <a:endParaRPr lang="en-IE"/>
           </a:p>
@@ -9230,7 +9230,7 @@
           <a:p>
             <a:fld id="{A84DC70D-79E8-44C0-9D0A-A84A8BDF845D}" type="datetimeFigureOut">
               <a:rPr lang="en-IE" smtClean="0"/>
-              <a:t>12/10/2025</a:t>
+              <a:t>04/03/2026</a:t>
             </a:fld>
             <a:endParaRPr lang="en-IE"/>
           </a:p>
@@ -9343,7 +9343,7 @@
           <a:p>
             <a:fld id="{A84DC70D-79E8-44C0-9D0A-A84A8BDF845D}" type="datetimeFigureOut">
               <a:rPr lang="en-IE" smtClean="0"/>
-              <a:t>12/10/2025</a:t>
+              <a:t>04/03/2026</a:t>
             </a:fld>
             <a:endParaRPr lang="en-IE"/>
           </a:p>
@@ -9656,7 +9656,7 @@
           <a:p>
             <a:fld id="{A84DC70D-79E8-44C0-9D0A-A84A8BDF845D}" type="datetimeFigureOut">
               <a:rPr lang="en-IE" smtClean="0"/>
-              <a:t>12/10/2025</a:t>
+              <a:t>04/03/2026</a:t>
             </a:fld>
             <a:endParaRPr lang="en-IE"/>
           </a:p>
@@ -9945,7 +9945,7 @@
           <a:p>
             <a:fld id="{A84DC70D-79E8-44C0-9D0A-A84A8BDF845D}" type="datetimeFigureOut">
               <a:rPr lang="en-IE" smtClean="0"/>
-              <a:t>12/10/2025</a:t>
+              <a:t>04/03/2026</a:t>
             </a:fld>
             <a:endParaRPr lang="en-IE"/>
           </a:p>
@@ -10188,7 +10188,7 @@
           <a:p>
             <a:fld id="{A84DC70D-79E8-44C0-9D0A-A84A8BDF845D}" type="datetimeFigureOut">
               <a:rPr lang="en-IE" smtClean="0"/>
-              <a:t>12/10/2025</a:t>
+              <a:t>04/03/2026</a:t>
             </a:fld>
             <a:endParaRPr lang="en-IE"/>
           </a:p>
@@ -10657,7 +10657,7 @@
             </a:r>
             <a:r>
               <a:rPr lang="en-IE" sz="2200"/>
-              <a:t>- 2025</a:t>
+              <a:t>- 2026</a:t>
             </a:r>
             <a:endParaRPr lang="en-US" sz="2200" dirty="0">
               <a:solidFill>
@@ -18086,6 +18086,12 @@
 </file>
 
 <file path=customXml/item1.xml><?xml version="1.0" encoding="utf-8"?>
+<p:properties xmlns:p="http://schemas.microsoft.com/office/2006/metadata/properties" xmlns:xsi="http://www.w3.org/2001/XMLSchema-instance" xmlns:pc="http://schemas.microsoft.com/office/infopath/2007/PartnerControls">
+  <documentManagement/>
+</p:properties>
+</file>
+
+<file path=customXml/item2.xml><?xml version="1.0" encoding="utf-8"?>
 <ct:contentTypeSchema xmlns:ct="http://schemas.microsoft.com/office/2006/metadata/contentType" xmlns:ma="http://schemas.microsoft.com/office/2006/metadata/properties/metaAttributes" ct:_="" ma:_="" ma:contentTypeName="Document" ma:contentTypeID="0x010100027B1FB1A458AA4FB1520DBCEEEF84AB" ma:contentTypeVersion="12" ma:contentTypeDescription="Create a new document." ma:contentTypeScope="" ma:versionID="1e36a6e3acf469d288ca5924e281fce4">
   <xsd:schema xmlns:xsd="http://www.w3.org/2001/XMLSchema" xmlns:xs="http://www.w3.org/2001/XMLSchema" xmlns:p="http://schemas.microsoft.com/office/2006/metadata/properties" xmlns:ns3="2ce51dc8-c7fd-4e9f-aab7-66ee981bb74f" xmlns:ns4="4fa34961-db85-4b4a-bce8-6d4fac0faa91" targetNamespace="http://schemas.microsoft.com/office/2006/metadata/properties" ma:root="true" ma:fieldsID="6156cdd135d49b7aa70247738826da10" ns3:_="" ns4:_="">
     <xsd:import namespace="2ce51dc8-c7fd-4e9f-aab7-66ee981bb74f"/>
@@ -18302,12 +18308,6 @@
 </ct:contentTypeSchema>
 </file>
 
-<file path=customXml/item2.xml><?xml version="1.0" encoding="utf-8"?>
-<p:properties xmlns:p="http://schemas.microsoft.com/office/2006/metadata/properties" xmlns:xsi="http://www.w3.org/2001/XMLSchema-instance" xmlns:pc="http://schemas.microsoft.com/office/infopath/2007/PartnerControls">
-  <documentManagement/>
-</p:properties>
-</file>
-
 <file path=customXml/item3.xml><?xml version="1.0" encoding="utf-8"?>
 <?mso-contentType ?>
 <FormTemplates xmlns="http://schemas.microsoft.com/sharepoint/v3/contenttype/forms">
@@ -18318,6 +18318,23 @@
 </file>
 
 <file path=customXml/itemProps1.xml><?xml version="1.0" encoding="utf-8"?>
+<ds:datastoreItem xmlns:ds="http://schemas.openxmlformats.org/officeDocument/2006/customXml" ds:itemID="{8EC65B6D-7D5A-4183-BAAE-4BE4E6C64048}">
+  <ds:schemaRefs>
+    <ds:schemaRef ds:uri="2ce51dc8-c7fd-4e9f-aab7-66ee981bb74f"/>
+    <ds:schemaRef ds:uri="http://schemas.microsoft.com/office/2006/metadata/properties"/>
+    <ds:schemaRef ds:uri="http://www.w3.org/XML/1998/namespace"/>
+    <ds:schemaRef ds:uri="http://purl.org/dc/dcmitype/"/>
+    <ds:schemaRef ds:uri="http://purl.org/dc/elements/1.1/"/>
+    <ds:schemaRef ds:uri="http://schemas.openxmlformats.org/package/2006/metadata/core-properties"/>
+    <ds:schemaRef ds:uri="http://schemas.microsoft.com/office/2006/documentManagement/types"/>
+    <ds:schemaRef ds:uri="http://purl.org/dc/terms/"/>
+    <ds:schemaRef ds:uri="http://schemas.microsoft.com/office/infopath/2007/PartnerControls"/>
+    <ds:schemaRef ds:uri="4fa34961-db85-4b4a-bce8-6d4fac0faa91"/>
+  </ds:schemaRefs>
+</ds:datastoreItem>
+</file>
+
+<file path=customXml/itemProps2.xml><?xml version="1.0" encoding="utf-8"?>
 <ds:datastoreItem xmlns:ds="http://schemas.openxmlformats.org/officeDocument/2006/customXml" ds:itemID="{D2BA282D-F6C5-4540-874A-AF79A5B1B989}">
   <ds:schemaRefs>
     <ds:schemaRef ds:uri="http://schemas.microsoft.com/office/2006/metadata/contentType"/>
@@ -18336,23 +18353,6 @@
 </ds:datastoreItem>
 </file>
 
-<file path=customXml/itemProps2.xml><?xml version="1.0" encoding="utf-8"?>
-<ds:datastoreItem xmlns:ds="http://schemas.openxmlformats.org/officeDocument/2006/customXml" ds:itemID="{8EC65B6D-7D5A-4183-BAAE-4BE4E6C64048}">
-  <ds:schemaRefs>
-    <ds:schemaRef ds:uri="2ce51dc8-c7fd-4e9f-aab7-66ee981bb74f"/>
-    <ds:schemaRef ds:uri="http://schemas.microsoft.com/office/2006/metadata/properties"/>
-    <ds:schemaRef ds:uri="http://www.w3.org/XML/1998/namespace"/>
-    <ds:schemaRef ds:uri="http://purl.org/dc/dcmitype/"/>
-    <ds:schemaRef ds:uri="http://purl.org/dc/elements/1.1/"/>
-    <ds:schemaRef ds:uri="http://schemas.openxmlformats.org/package/2006/metadata/core-properties"/>
-    <ds:schemaRef ds:uri="http://schemas.microsoft.com/office/2006/documentManagement/types"/>
-    <ds:schemaRef ds:uri="http://purl.org/dc/terms/"/>
-    <ds:schemaRef ds:uri="http://schemas.microsoft.com/office/infopath/2007/PartnerControls"/>
-    <ds:schemaRef ds:uri="4fa34961-db85-4b4a-bce8-6d4fac0faa91"/>
-  </ds:schemaRefs>
-</ds:datastoreItem>
-</file>
-
 <file path=customXml/itemProps3.xml><?xml version="1.0" encoding="utf-8"?>
 <ds:datastoreItem xmlns:ds="http://schemas.openxmlformats.org/officeDocument/2006/customXml" ds:itemID="{D1AEA60D-C59C-4956-9730-7FEF75B391D5}">
   <ds:schemaRefs>
